--- a/templates/39-roles-and-permissions-matrix-template.pptx
+++ b/templates/39-roles-and-permissions-matrix-template.pptx
@@ -3558,7 +3558,7 @@
         <p:spPr>
           <a:xfrm>
             <a:off x="457200" y="1207008"/>
-            <a:ext cx="2743200" cy="182880"/>
+            <a:ext cx="11277295" cy="274320"/>
           </a:xfrm>
           <a:prstGeom prst="rect">
             <a:avLst/>
@@ -3574,13 +3574,13 @@
           <a:p>
             <a:pPr algn="l"/>
             <a:r>
-              <a:rPr lang="en-AU" sz="800" b="1" dirty="0">
+              <a:rPr lang="en-AU" sz="1250" b="1" dirty="0">
                 <a:solidFill>
-                  <a:srgbClr val="6B6A66"/>
+                  <a:srgbClr val="184F95"/>
                 </a:solidFill>
                 <a:latin typeface="Aptos"/>
               </a:rPr>
-              <a:t>HOW TO FILL IT IN</a:t>
+              <a:t>Roles and Permissions Matrix — blank template</a:t>
             </a:r>
           </a:p>
         </p:txBody>
@@ -3593,8 +3593,8 @@
         </p:nvSpPr>
         <p:spPr>
           <a:xfrm>
-            <a:off x="457200" y="1408176"/>
-            <a:ext cx="2743200" cy="914400"/>
+            <a:off x="457200" y="6089904"/>
+            <a:ext cx="11277295" cy="347472"/>
           </a:xfrm>
           <a:prstGeom prst="rect">
             <a:avLst/>
@@ -3610,9 +3610,9 @@
           <a:p>
             <a:pPr algn="l"/>
             <a:r>
-              <a:rPr lang="en-AU" sz="950" dirty="0">
+              <a:rPr lang="en-AU" sz="850" dirty="0">
                 <a:solidFill>
-                  <a:srgbClr val="0B0B0B"/>
+                  <a:srgbClr val="6B6A66"/>
                 </a:solidFill>
                 <a:latin typeface="Aptos"/>
               </a:rPr>
@@ -3629,8 +3629,8 @@
         </p:nvSpPr>
         <p:spPr>
           <a:xfrm>
-            <a:off x="457200" y="2414016"/>
-            <a:ext cx="2743200" cy="182880"/>
+            <a:off x="1828800" y="1700784"/>
+            <a:ext cx="9905695" cy="237744"/>
           </a:xfrm>
           <a:prstGeom prst="rect">
             <a:avLst/>
@@ -3641,18 +3641,18 @@
           </a:ln>
         </p:spPr>
         <p:txBody>
-          <a:bodyPr wrap="square" anchor="b" lIns="0" rIns="0" tIns="27432" bIns="27432"/>
-          <a:lstStyle/>
-          <a:p>
-            <a:pPr algn="l"/>
-            <a:r>
-              <a:rPr lang="en-AU" sz="800" b="1" dirty="0">
+          <a:bodyPr wrap="square" anchor="ctr" lIns="54864" rIns="54864" tIns="27432" bIns="27432"/>
+          <a:lstStyle/>
+          <a:p>
+            <a:pPr algn="ctr"/>
+            <a:r>
+              <a:rPr lang="en-AU" sz="900" dirty="0">
                 <a:solidFill>
                   <a:srgbClr val="6B6A66"/>
                 </a:solidFill>
                 <a:latin typeface="Aptos"/>
               </a:rPr>
-              <a:t>WHAT IT IS FOR</a:t>
+              <a:t>Action →</a:t>
             </a:r>
           </a:p>
         </p:txBody>
@@ -3665,8 +3665,8 @@
         </p:nvSpPr>
         <p:spPr>
           <a:xfrm>
-            <a:off x="457200" y="2615184"/>
-            <a:ext cx="2743200" cy="731520"/>
+            <a:off x="1828800" y="1938528"/>
+            <a:ext cx="2476424" cy="237744"/>
           </a:xfrm>
           <a:prstGeom prst="rect">
             <a:avLst/>
@@ -3677,18 +3677,18 @@
           </a:ln>
         </p:spPr>
         <p:txBody>
-          <a:bodyPr wrap="square" anchor="t" lIns="0" rIns="0" tIns="27432" bIns="27432"/>
-          <a:lstStyle/>
-          <a:p>
-            <a:pPr algn="l"/>
-            <a:r>
-              <a:rPr lang="en-AU" sz="950" dirty="0">
+          <a:bodyPr wrap="square" anchor="ctr" lIns="54864" rIns="54864" tIns="27432" bIns="27432"/>
+          <a:lstStyle/>
+          <a:p>
+            <a:pPr algn="ctr"/>
+            <a:r>
+              <a:rPr lang="en-AU" sz="900" b="1" dirty="0">
                 <a:solidFill>
-                  <a:srgbClr val="0B0B0B"/>
+                  <a:srgbClr val="6B6A66"/>
                 </a:solidFill>
                 <a:latin typeface="Aptos"/>
               </a:rPr>
-              <a:t>Sets out which role may perform which action on which object, exposing gaps, overlaps and separation-of-duty breaches.</a:t>
+              <a:t>Create</a:t>
             </a:r>
           </a:p>
         </p:txBody>
@@ -3701,8 +3701,8 @@
         </p:nvSpPr>
         <p:spPr>
           <a:xfrm>
-            <a:off x="457200" y="3438144"/>
-            <a:ext cx="2743200" cy="182880"/>
+            <a:off x="4305224" y="1938528"/>
+            <a:ext cx="2476424" cy="237744"/>
           </a:xfrm>
           <a:prstGeom prst="rect">
             <a:avLst/>
@@ -3713,18 +3713,18 @@
           </a:ln>
         </p:spPr>
         <p:txBody>
-          <a:bodyPr wrap="square" anchor="b" lIns="0" rIns="0" tIns="27432" bIns="27432"/>
-          <a:lstStyle/>
-          <a:p>
-            <a:pPr algn="l"/>
-            <a:r>
-              <a:rPr lang="en-AU" sz="800" b="1" dirty="0">
+          <a:bodyPr wrap="square" anchor="ctr" lIns="54864" rIns="54864" tIns="27432" bIns="27432"/>
+          <a:lstStyle/>
+          <a:p>
+            <a:pPr algn="ctr"/>
+            <a:r>
+              <a:rPr lang="en-AU" sz="900" b="1" dirty="0">
                 <a:solidFill>
                   <a:srgbClr val="6B6A66"/>
                 </a:solidFill>
                 <a:latin typeface="Aptos"/>
               </a:rPr>
-              <a:t>MOST OFTEN CONFUSED WITH</a:t>
+              <a:t>Approve</a:t>
             </a:r>
           </a:p>
         </p:txBody>
@@ -3737,76 +3737,8 @@
         </p:nvSpPr>
         <p:spPr>
           <a:xfrm>
-            <a:off x="457200" y="3639312"/>
-            <a:ext cx="2743200" cy="1737360"/>
-          </a:xfrm>
-          <a:prstGeom prst="rect">
-            <a:avLst/>
-          </a:prstGeom>
-          <a:solidFill>
-            <a:srgbClr val="F7F7F5"/>
-          </a:solidFill>
-          <a:ln>
-            <a:noFill/>
-          </a:ln>
-        </p:spPr>
-        <p:txBody>
-          <a:bodyPr wrap="square" anchor="t" lIns="91440" rIns="91440" tIns="27432" bIns="27432"/>
-          <a:lstStyle/>
-          <a:p>
-            <a:pPr algn="l"/>
-            <a:r>
-              <a:rPr lang="en-AU" sz="900" dirty="0">
-                <a:solidFill>
-                  <a:srgbClr val="0B0B0B"/>
-                </a:solidFill>
-                <a:latin typeface="Aptos"/>
-              </a:rPr>
-              <a:t>A roles and permissions matrix governs what a role may do in the solution; organisational modelling describes where the role sits. Permission versus position.</a:t>
-            </a:r>
-          </a:p>
-        </p:txBody>
-      </p:sp>
-      <p:sp>
-        <p:nvSpPr>
-          <p:cNvPr id="51" name="shape51"/>
-          <p:cNvSpPr/>
-          <p:nvPr/>
-        </p:nvSpPr>
-        <p:spPr>
-          <a:xfrm>
-            <a:off x="457200" y="3639312"/>
-            <a:ext cx="32004" cy="1737360"/>
-          </a:xfrm>
-          <a:prstGeom prst="rect">
-            <a:avLst/>
-          </a:prstGeom>
-          <a:solidFill>
-            <a:srgbClr val="FAB219"/>
-          </a:solidFill>
-          <a:ln>
-            <a:noFill/>
-          </a:ln>
-        </p:spPr>
-        <p:txBody>
-          <a:bodyPr wrap="square" anchor="ctr" lIns="54864" rIns="54864" tIns="27432" bIns="27432"/>
-          <a:lstStyle/>
-          <a:p>
-            <a:pPr algn="l"/>
-            <a:endParaRPr lang="en-AU" sz="1100"/>
-          </a:p>
-        </p:txBody>
-      </p:sp>
-      <p:sp>
-        <p:nvSpPr>
-          <p:cNvPr id="52" name="shape52"/>
-          <p:cNvSpPr/>
-          <p:nvPr/>
-        </p:nvSpPr>
-        <p:spPr>
-          <a:xfrm>
-            <a:off x="457200" y="5486400"/>
-            <a:ext cx="2743200" cy="502920"/>
+            <a:off x="6781648" y="1938528"/>
+            <a:ext cx="2476424" cy="237744"/>
           </a:xfrm>
           <a:prstGeom prst="rect">
             <a:avLst/>
@@ -3817,32 +3749,32 @@
           </a:ln>
         </p:spPr>
         <p:txBody>
-          <a:bodyPr wrap="square" anchor="t" lIns="0" rIns="0" tIns="27432" bIns="27432"/>
-          <a:lstStyle/>
-          <a:p>
-            <a:pPr algn="l"/>
-            <a:r>
-              <a:rPr lang="en-AU" sz="800" dirty="0">
+          <a:bodyPr wrap="square" anchor="ctr" lIns="54864" rIns="54864" tIns="27432" bIns="27432"/>
+          <a:lstStyle/>
+          <a:p>
+            <a:pPr algn="ctr"/>
+            <a:r>
+              <a:rPr lang="en-AU" sz="900" b="1" dirty="0">
                 <a:solidFill>
                   <a:srgbClr val="6B6A66"/>
                 </a:solidFill>
                 <a:latin typeface="Aptos"/>
               </a:rPr>
-              <a:t>Tasks: 7.1 Specify and Model Requirements · 6.2 Define Future State</a:t>
-            </a:r>
-          </a:p>
-        </p:txBody>
-      </p:sp>
-      <p:sp>
-        <p:nvSpPr>
-          <p:cNvPr id="53" name="shape53"/>
+              <a:t>Amend</a:t>
+            </a:r>
+          </a:p>
+        </p:txBody>
+      </p:sp>
+      <p:sp>
+        <p:nvSpPr>
+          <p:cNvPr id="51" name="shape51"/>
           <p:cNvSpPr/>
           <p:nvPr/>
         </p:nvSpPr>
         <p:spPr>
           <a:xfrm>
-            <a:off x="3520440" y="1188720"/>
-            <a:ext cx="8214055" cy="237744"/>
+            <a:off x="9258071" y="1938528"/>
+            <a:ext cx="2476424" cy="237744"/>
           </a:xfrm>
           <a:prstGeom prst="rect">
             <a:avLst/>
@@ -3853,32 +3785,32 @@
           </a:ln>
         </p:spPr>
         <p:txBody>
-          <a:bodyPr wrap="square" anchor="b" lIns="0" rIns="0" tIns="27432" bIns="27432"/>
-          <a:lstStyle/>
-          <a:p>
-            <a:pPr algn="l"/>
-            <a:r>
-              <a:rPr lang="en-AU" sz="1050" b="1" dirty="0">
+          <a:bodyPr wrap="square" anchor="ctr" lIns="54864" rIns="54864" tIns="27432" bIns="27432"/>
+          <a:lstStyle/>
+          <a:p>
+            <a:pPr algn="ctr"/>
+            <a:r>
+              <a:rPr lang="en-AU" sz="900" b="1" dirty="0">
                 <a:solidFill>
-                  <a:srgbClr val="184F95"/>
+                  <a:srgbClr val="6B6A66"/>
                 </a:solidFill>
                 <a:latin typeface="Aptos"/>
               </a:rPr>
-              <a:t>Roles and Permissions Matrix — blank template</a:t>
-            </a:r>
-          </a:p>
-        </p:txBody>
-      </p:sp>
-      <p:sp>
-        <p:nvSpPr>
-          <p:cNvPr id="54" name="shape54"/>
+              <a:t>Delete</a:t>
+            </a:r>
+          </a:p>
+        </p:txBody>
+      </p:sp>
+      <p:sp>
+        <p:nvSpPr>
+          <p:cNvPr id="52" name="shape52"/>
           <p:cNvSpPr/>
           <p:nvPr/>
         </p:nvSpPr>
         <p:spPr>
           <a:xfrm>
-            <a:off x="4892040" y="1499616"/>
-            <a:ext cx="6842455" cy="237744"/>
+            <a:off x="457200" y="2203704"/>
+            <a:ext cx="1280160" cy="1298448"/>
           </a:xfrm>
           <a:prstGeom prst="rect">
             <a:avLst/>
@@ -3892,186 +3824,6 @@
           <a:bodyPr wrap="square" anchor="ctr" lIns="54864" rIns="54864" tIns="27432" bIns="27432"/>
           <a:lstStyle/>
           <a:p>
-            <a:pPr algn="ctr"/>
-            <a:r>
-              <a:rPr lang="en-AU" sz="900" dirty="0">
-                <a:solidFill>
-                  <a:srgbClr val="6B6A66"/>
-                </a:solidFill>
-                <a:latin typeface="Aptos"/>
-              </a:rPr>
-              <a:t>Action →</a:t>
-            </a:r>
-          </a:p>
-        </p:txBody>
-      </p:sp>
-      <p:sp>
-        <p:nvSpPr>
-          <p:cNvPr id="55" name="shape55"/>
-          <p:cNvSpPr/>
-          <p:nvPr/>
-        </p:nvSpPr>
-        <p:spPr>
-          <a:xfrm>
-            <a:off x="4892040" y="1737360"/>
-            <a:ext cx="1710614" cy="237744"/>
-          </a:xfrm>
-          <a:prstGeom prst="rect">
-            <a:avLst/>
-          </a:prstGeom>
-          <a:noFill/>
-          <a:ln>
-            <a:noFill/>
-          </a:ln>
-        </p:spPr>
-        <p:txBody>
-          <a:bodyPr wrap="square" anchor="ctr" lIns="54864" rIns="54864" tIns="27432" bIns="27432"/>
-          <a:lstStyle/>
-          <a:p>
-            <a:pPr algn="ctr"/>
-            <a:r>
-              <a:rPr lang="en-AU" sz="900" b="1" dirty="0">
-                <a:solidFill>
-                  <a:srgbClr val="6B6A66"/>
-                </a:solidFill>
-                <a:latin typeface="Aptos"/>
-              </a:rPr>
-              <a:t>Create</a:t>
-            </a:r>
-          </a:p>
-        </p:txBody>
-      </p:sp>
-      <p:sp>
-        <p:nvSpPr>
-          <p:cNvPr id="56" name="shape56"/>
-          <p:cNvSpPr/>
-          <p:nvPr/>
-        </p:nvSpPr>
-        <p:spPr>
-          <a:xfrm>
-            <a:off x="6602654" y="1737360"/>
-            <a:ext cx="1710614" cy="237744"/>
-          </a:xfrm>
-          <a:prstGeom prst="rect">
-            <a:avLst/>
-          </a:prstGeom>
-          <a:noFill/>
-          <a:ln>
-            <a:noFill/>
-          </a:ln>
-        </p:spPr>
-        <p:txBody>
-          <a:bodyPr wrap="square" anchor="ctr" lIns="54864" rIns="54864" tIns="27432" bIns="27432"/>
-          <a:lstStyle/>
-          <a:p>
-            <a:pPr algn="ctr"/>
-            <a:r>
-              <a:rPr lang="en-AU" sz="900" b="1" dirty="0">
-                <a:solidFill>
-                  <a:srgbClr val="6B6A66"/>
-                </a:solidFill>
-                <a:latin typeface="Aptos"/>
-              </a:rPr>
-              <a:t>Approve</a:t>
-            </a:r>
-          </a:p>
-        </p:txBody>
-      </p:sp>
-      <p:sp>
-        <p:nvSpPr>
-          <p:cNvPr id="57" name="shape57"/>
-          <p:cNvSpPr/>
-          <p:nvPr/>
-        </p:nvSpPr>
-        <p:spPr>
-          <a:xfrm>
-            <a:off x="8313268" y="1737360"/>
-            <a:ext cx="1710614" cy="237744"/>
-          </a:xfrm>
-          <a:prstGeom prst="rect">
-            <a:avLst/>
-          </a:prstGeom>
-          <a:noFill/>
-          <a:ln>
-            <a:noFill/>
-          </a:ln>
-        </p:spPr>
-        <p:txBody>
-          <a:bodyPr wrap="square" anchor="ctr" lIns="54864" rIns="54864" tIns="27432" bIns="27432"/>
-          <a:lstStyle/>
-          <a:p>
-            <a:pPr algn="ctr"/>
-            <a:r>
-              <a:rPr lang="en-AU" sz="900" b="1" dirty="0">
-                <a:solidFill>
-                  <a:srgbClr val="6B6A66"/>
-                </a:solidFill>
-                <a:latin typeface="Aptos"/>
-              </a:rPr>
-              <a:t>Amend</a:t>
-            </a:r>
-          </a:p>
-        </p:txBody>
-      </p:sp>
-      <p:sp>
-        <p:nvSpPr>
-          <p:cNvPr id="58" name="shape58"/>
-          <p:cNvSpPr/>
-          <p:nvPr/>
-        </p:nvSpPr>
-        <p:spPr>
-          <a:xfrm>
-            <a:off x="10023881" y="1737360"/>
-            <a:ext cx="1710614" cy="237744"/>
-          </a:xfrm>
-          <a:prstGeom prst="rect">
-            <a:avLst/>
-          </a:prstGeom>
-          <a:noFill/>
-          <a:ln>
-            <a:noFill/>
-          </a:ln>
-        </p:spPr>
-        <p:txBody>
-          <a:bodyPr wrap="square" anchor="ctr" lIns="54864" rIns="54864" tIns="27432" bIns="27432"/>
-          <a:lstStyle/>
-          <a:p>
-            <a:pPr algn="ctr"/>
-            <a:r>
-              <a:rPr lang="en-AU" sz="900" b="1" dirty="0">
-                <a:solidFill>
-                  <a:srgbClr val="6B6A66"/>
-                </a:solidFill>
-                <a:latin typeface="Aptos"/>
-              </a:rPr>
-              <a:t>Delete</a:t>
-            </a:r>
-          </a:p>
-        </p:txBody>
-      </p:sp>
-      <p:sp>
-        <p:nvSpPr>
-          <p:cNvPr id="59" name="shape59"/>
-          <p:cNvSpPr/>
-          <p:nvPr/>
-        </p:nvSpPr>
-        <p:spPr>
-          <a:xfrm>
-            <a:off x="3520440" y="2002536"/>
-            <a:ext cx="1280160" cy="1146048"/>
-          </a:xfrm>
-          <a:prstGeom prst="rect">
-            <a:avLst/>
-          </a:prstGeom>
-          <a:noFill/>
-          <a:ln>
-            <a:noFill/>
-          </a:ln>
-        </p:spPr>
-        <p:txBody>
-          <a:bodyPr wrap="square" anchor="ctr" lIns="54864" rIns="54864" tIns="27432" bIns="27432"/>
-          <a:lstStyle/>
-          <a:p>
             <a:pPr algn="r"/>
             <a:r>
               <a:rPr lang="en-AU" sz="900" b="1" dirty="0">
@@ -4087,14 +3839,14 @@
       </p:sp>
       <p:sp>
         <p:nvSpPr>
-          <p:cNvPr id="60" name="shape60"/>
+          <p:cNvPr id="53" name="shape53"/>
           <p:cNvSpPr/>
           <p:nvPr/>
         </p:nvSpPr>
         <p:spPr>
           <a:xfrm>
-            <a:off x="4928616" y="2002536"/>
-            <a:ext cx="1637462" cy="1146048"/>
+            <a:off x="1865376" y="2203704"/>
+            <a:ext cx="2403272" cy="1298448"/>
           </a:xfrm>
           <a:prstGeom prst="roundRect">
             <a:avLst>
@@ -4121,14 +3873,14 @@
       </p:sp>
       <p:sp>
         <p:nvSpPr>
-          <p:cNvPr id="61" name="shape61"/>
+          <p:cNvPr id="54" name="shape54"/>
           <p:cNvSpPr/>
           <p:nvPr/>
         </p:nvSpPr>
         <p:spPr>
           <a:xfrm>
-            <a:off x="6639230" y="2002536"/>
-            <a:ext cx="1637462" cy="1146048"/>
+            <a:off x="4341800" y="2203704"/>
+            <a:ext cx="2403272" cy="1298448"/>
           </a:xfrm>
           <a:prstGeom prst="roundRect">
             <a:avLst>
@@ -4155,14 +3907,14 @@
       </p:sp>
       <p:sp>
         <p:nvSpPr>
-          <p:cNvPr id="62" name="shape62"/>
+          <p:cNvPr id="55" name="shape55"/>
           <p:cNvSpPr/>
           <p:nvPr/>
         </p:nvSpPr>
         <p:spPr>
           <a:xfrm>
-            <a:off x="8349844" y="2002536"/>
-            <a:ext cx="1637462" cy="1146048"/>
+            <a:off x="6818224" y="2203704"/>
+            <a:ext cx="2403272" cy="1298448"/>
           </a:xfrm>
           <a:prstGeom prst="roundRect">
             <a:avLst>
@@ -4189,14 +3941,14 @@
       </p:sp>
       <p:sp>
         <p:nvSpPr>
-          <p:cNvPr id="63" name="shape63"/>
+          <p:cNvPr id="56" name="shape56"/>
           <p:cNvSpPr/>
           <p:nvPr/>
         </p:nvSpPr>
         <p:spPr>
           <a:xfrm>
-            <a:off x="10060457" y="2002536"/>
-            <a:ext cx="1637462" cy="1146048"/>
+            <a:off x="9294647" y="2203704"/>
+            <a:ext cx="2403272" cy="1298448"/>
           </a:xfrm>
           <a:prstGeom prst="roundRect">
             <a:avLst>
@@ -4223,14 +3975,14 @@
       </p:sp>
       <p:sp>
         <p:nvSpPr>
-          <p:cNvPr id="64" name="shape64"/>
+          <p:cNvPr id="57" name="shape57"/>
           <p:cNvSpPr/>
           <p:nvPr/>
         </p:nvSpPr>
         <p:spPr>
           <a:xfrm>
-            <a:off x="3520440" y="3221736"/>
-            <a:ext cx="1280160" cy="1146048"/>
+            <a:off x="457200" y="3575304"/>
+            <a:ext cx="1280160" cy="1298448"/>
           </a:xfrm>
           <a:prstGeom prst="rect">
             <a:avLst/>
@@ -4259,14 +4011,14 @@
       </p:sp>
       <p:sp>
         <p:nvSpPr>
-          <p:cNvPr id="65" name="shape65"/>
+          <p:cNvPr id="58" name="shape58"/>
           <p:cNvSpPr/>
           <p:nvPr/>
         </p:nvSpPr>
         <p:spPr>
           <a:xfrm>
-            <a:off x="4928616" y="3221736"/>
-            <a:ext cx="1637462" cy="1146048"/>
+            <a:off x="1865376" y="3575304"/>
+            <a:ext cx="2403272" cy="1298448"/>
           </a:xfrm>
           <a:prstGeom prst="roundRect">
             <a:avLst>
@@ -4293,14 +4045,14 @@
       </p:sp>
       <p:sp>
         <p:nvSpPr>
-          <p:cNvPr id="66" name="shape66"/>
+          <p:cNvPr id="59" name="shape59"/>
           <p:cNvSpPr/>
           <p:nvPr/>
         </p:nvSpPr>
         <p:spPr>
           <a:xfrm>
-            <a:off x="6639230" y="3221736"/>
-            <a:ext cx="1637462" cy="1146048"/>
+            <a:off x="4341800" y="3575304"/>
+            <a:ext cx="2403272" cy="1298448"/>
           </a:xfrm>
           <a:prstGeom prst="roundRect">
             <a:avLst>
@@ -4327,14 +4079,14 @@
       </p:sp>
       <p:sp>
         <p:nvSpPr>
-          <p:cNvPr id="67" name="shape67"/>
+          <p:cNvPr id="60" name="shape60"/>
           <p:cNvSpPr/>
           <p:nvPr/>
         </p:nvSpPr>
         <p:spPr>
           <a:xfrm>
-            <a:off x="8349844" y="3221736"/>
-            <a:ext cx="1637462" cy="1146048"/>
+            <a:off x="6818224" y="3575304"/>
+            <a:ext cx="2403272" cy="1298448"/>
           </a:xfrm>
           <a:prstGeom prst="roundRect">
             <a:avLst>
@@ -4361,14 +4113,14 @@
       </p:sp>
       <p:sp>
         <p:nvSpPr>
-          <p:cNvPr id="68" name="shape68"/>
+          <p:cNvPr id="61" name="shape61"/>
           <p:cNvSpPr/>
           <p:nvPr/>
         </p:nvSpPr>
         <p:spPr>
           <a:xfrm>
-            <a:off x="10060457" y="3221736"/>
-            <a:ext cx="1637462" cy="1146048"/>
+            <a:off x="9294647" y="3575304"/>
+            <a:ext cx="2403272" cy="1298448"/>
           </a:xfrm>
           <a:prstGeom prst="roundRect">
             <a:avLst>
@@ -4395,14 +4147,14 @@
       </p:sp>
       <p:sp>
         <p:nvSpPr>
-          <p:cNvPr id="69" name="shape69"/>
+          <p:cNvPr id="62" name="shape62"/>
           <p:cNvSpPr/>
           <p:nvPr/>
         </p:nvSpPr>
         <p:spPr>
           <a:xfrm>
-            <a:off x="3520440" y="4440936"/>
-            <a:ext cx="1280160" cy="1146048"/>
+            <a:off x="457200" y="4946904"/>
+            <a:ext cx="1280160" cy="1298448"/>
           </a:xfrm>
           <a:prstGeom prst="rect">
             <a:avLst/>
@@ -4431,14 +4183,14 @@
       </p:sp>
       <p:sp>
         <p:nvSpPr>
-          <p:cNvPr id="70" name="shape70"/>
+          <p:cNvPr id="63" name="shape63"/>
           <p:cNvSpPr/>
           <p:nvPr/>
         </p:nvSpPr>
         <p:spPr>
           <a:xfrm>
-            <a:off x="4928616" y="4440936"/>
-            <a:ext cx="1637462" cy="1146048"/>
+            <a:off x="1865376" y="4946904"/>
+            <a:ext cx="2403272" cy="1298448"/>
           </a:xfrm>
           <a:prstGeom prst="roundRect">
             <a:avLst>
@@ -4465,14 +4217,14 @@
       </p:sp>
       <p:sp>
         <p:nvSpPr>
-          <p:cNvPr id="71" name="shape71"/>
+          <p:cNvPr id="64" name="shape64"/>
           <p:cNvSpPr/>
           <p:nvPr/>
         </p:nvSpPr>
         <p:spPr>
           <a:xfrm>
-            <a:off x="6639230" y="4440936"/>
-            <a:ext cx="1637462" cy="1146048"/>
+            <a:off x="4341800" y="4946904"/>
+            <a:ext cx="2403272" cy="1298448"/>
           </a:xfrm>
           <a:prstGeom prst="roundRect">
             <a:avLst>
@@ -4499,14 +4251,14 @@
       </p:sp>
       <p:sp>
         <p:nvSpPr>
-          <p:cNvPr id="72" name="shape72"/>
+          <p:cNvPr id="65" name="shape65"/>
           <p:cNvSpPr/>
           <p:nvPr/>
         </p:nvSpPr>
         <p:spPr>
           <a:xfrm>
-            <a:off x="8349844" y="4440936"/>
-            <a:ext cx="1637462" cy="1146048"/>
+            <a:off x="6818224" y="4946904"/>
+            <a:ext cx="2403272" cy="1298448"/>
           </a:xfrm>
           <a:prstGeom prst="roundRect">
             <a:avLst>
@@ -4533,14 +4285,14 @@
       </p:sp>
       <p:sp>
         <p:nvSpPr>
-          <p:cNvPr id="73" name="shape73"/>
+          <p:cNvPr id="66" name="shape66"/>
           <p:cNvSpPr/>
           <p:nvPr/>
         </p:nvSpPr>
         <p:spPr>
           <a:xfrm>
-            <a:off x="10060457" y="4440936"/>
-            <a:ext cx="1637462" cy="1146048"/>
+            <a:off x="9294647" y="4946904"/>
+            <a:ext cx="2403272" cy="1298448"/>
           </a:xfrm>
           <a:prstGeom prst="roundRect">
             <a:avLst>
@@ -4567,13 +4319,13 @@
       </p:sp>
       <p:sp>
         <p:nvSpPr>
-          <p:cNvPr id="74" name="shape74"/>
+          <p:cNvPr id="67" name="shape67"/>
           <p:cNvSpPr/>
           <p:nvPr/>
         </p:nvSpPr>
         <p:spPr>
           <a:xfrm>
-            <a:off x="3474720" y="2002536"/>
+            <a:off x="411480" y="2203704"/>
             <a:ext cx="1280160" cy="219456"/>
           </a:xfrm>
           <a:prstGeom prst="rect">
